--- a/FY2025 Executive Intelligence Summary From Elevated Risk to Direct Confrontation The New Battlefield Blurring Lines Between Crime & Conflict (2).pptx
+++ b/FY2025 Executive Intelligence Summary From Elevated Risk to Direct Confrontation The New Battlefield Blurring Lines Between Crime & Conflict (2).pptx
@@ -6,19 +6,12 @@
   </p:sldMasterIdLst>
   <p:sldIdLst>
     <p:sldId id="256" r:id="rId6"/>
+    <p:sldId id="257" r:id="rId7"/>
+    <p:sldId id="258" r:id="rId8"/>
+    <p:sldId id="259" r:id="rId9"/>
   </p:sldIdLst>
   <p:sldSz cx="26212800" cy="14630400"/>
   <p:notesSz cx="6858000" cy="9144000"/>
-  <p:embeddedFontLst>
-    <p:embeddedFont>
-      <p:font typeface="Roboto Condensed" charset="1" panose="02000000000000000000"/>
-      <p:regular r:id="rId7"/>
-    </p:embeddedFont>
-    <p:embeddedFont>
-      <p:font typeface="Clear Sans Bold" charset="1" panose="020B0803030202020304"/>
-      <p:regular r:id="rId8"/>
-    </p:embeddedFont>
-  </p:embeddedFontLst>
   <p:defaultTextStyle>
     <a:defPPr>
       <a:defRPr lang="en-US"/>
@@ -3077,8 +3070,8 @@
         </p:nvSpPr>
         <p:spPr>
           <a:xfrm flipH="false" flipV="false" rot="0">
-            <a:off x="0" y="0"/>
-            <a:ext cx="26212800" cy="14624558"/>
+            <a:off x="2137028" y="0"/>
+            <a:ext cx="21938744" cy="14630400"/>
           </a:xfrm>
           <a:custGeom>
             <a:avLst/>
@@ -3087,18 +3080,18 @@
             <a:cxnLst/>
             <a:rect r="r" b="b" t="t" l="l"/>
             <a:pathLst>
-              <a:path h="14624558" w="26212800">
+              <a:path h="14630400" w="21938744">
                 <a:moveTo>
                   <a:pt x="0" y="0"/>
                 </a:moveTo>
                 <a:lnTo>
-                  <a:pt x="26212800" y="0"/>
+                  <a:pt x="21938744" y="0"/>
                 </a:lnTo>
                 <a:lnTo>
-                  <a:pt x="26212800" y="14624558"/>
+                  <a:pt x="21938744" y="14630400"/>
                 </a:lnTo>
                 <a:lnTo>
-                  <a:pt x="0" y="14624558"/>
+                  <a:pt x="0" y="14630400"/>
                 </a:lnTo>
                 <a:lnTo>
                   <a:pt x="0" y="0"/>
@@ -3115,1369 +3108,218 @@
           </a:blipFill>
         </p:spPr>
       </p:sp>
-      <p:sp>
-        <p:nvSpPr>
-          <p:cNvPr name="TextBox 3" id="3"/>
-          <p:cNvSpPr txBox="true"/>
+    </p:spTree>
+  </p:cSld>
+  <p:clrMapOvr>
+    <a:masterClrMapping/>
+  </p:clrMapOvr>
+</p:sld>
+</file>
+
+<file path=ppt/slides/slide2.xml><?xml version="1.0" encoding="utf-8"?>
+<p:sld xmlns:p="http://schemas.openxmlformats.org/presentationml/2006/main" xmlns:a="http://schemas.openxmlformats.org/drawingml/2006/main" xmlns:r="http://schemas.openxmlformats.org/officeDocument/2006/relationships">
+  <p:cSld>
+    <p:spTree>
+      <p:nvGrpSpPr>
+        <p:cNvPr id="1" name=""/>
+        <p:cNvGrpSpPr/>
+        <p:nvPr/>
+      </p:nvGrpSpPr>
+      <p:grpSpPr>
+        <a:xfrm>
+          <a:off x="0" y="0"/>
+          <a:ext cx="0" cy="0"/>
+          <a:chOff x="0" y="0"/>
+          <a:chExt cx="0" cy="0"/>
+        </a:xfrm>
+      </p:grpSpPr>
+      <p:sp>
+        <p:nvSpPr>
+          <p:cNvPr name="Freeform 2" id="2"/>
+          <p:cNvSpPr/>
           <p:nvPr/>
         </p:nvSpPr>
         <p:spPr>
-          <a:xfrm rot="0">
-            <a:off x="1048512" y="742484"/>
-            <a:ext cx="20250150" cy="1857934"/>
+          <a:xfrm flipH="false" flipV="false" rot="0">
+            <a:off x="0" y="60960"/>
+            <a:ext cx="26212800" cy="13106400"/>
           </a:xfrm>
-          <a:prstGeom prst="rect">
+          <a:custGeom>
             <a:avLst/>
-          </a:prstGeom>
+            <a:gdLst/>
+            <a:ahLst/>
+            <a:cxnLst/>
+            <a:rect r="r" b="b" t="t" l="l"/>
+            <a:pathLst>
+              <a:path h="13106400" w="26212800">
+                <a:moveTo>
+                  <a:pt x="0" y="0"/>
+                </a:moveTo>
+                <a:lnTo>
+                  <a:pt x="26212800" y="0"/>
+                </a:lnTo>
+                <a:lnTo>
+                  <a:pt x="26212800" y="13106400"/>
+                </a:lnTo>
+                <a:lnTo>
+                  <a:pt x="0" y="13106400"/>
+                </a:lnTo>
+                <a:lnTo>
+                  <a:pt x="0" y="0"/>
+                </a:lnTo>
+                <a:close/>
+              </a:path>
+            </a:pathLst>
+          </a:custGeom>
+          <a:blipFill>
+            <a:blip r:embed="rId2"/>
+            <a:stretch>
+              <a:fillRect l="0" t="0" r="0" b="0"/>
+            </a:stretch>
+          </a:blipFill>
         </p:spPr>
-        <p:txBody>
-          <a:bodyPr anchor="t" rtlCol="false" tIns="0" lIns="0" bIns="0" rIns="0">
-            <a:spAutoFit/>
-          </a:bodyPr>
-          <a:lstStyle/>
-          <a:p>
-            <a:pPr algn="l">
-              <a:lnSpc>
-                <a:spcPts val="7237"/>
-              </a:lnSpc>
-            </a:pPr>
-            <a:r>
-              <a:rPr lang="en-US" sz="7492" spc="337">
-                <a:solidFill>
-                  <a:srgbClr val="118051"/>
-                </a:solidFill>
-                <a:latin typeface="Roboto Condensed"/>
-                <a:ea typeface="Roboto Condensed"/>
-                <a:cs typeface="Roboto Condensed"/>
-                <a:sym typeface="Roboto Condensed"/>
-              </a:rPr>
-              <a:t>CYBER FRAUD LANDSCAPE 2025-2026:</a:t>
-            </a:r>
-          </a:p>
-          <a:p>
-            <a:pPr algn="l">
-              <a:lnSpc>
-                <a:spcPts val="7041"/>
-              </a:lnSpc>
-            </a:pPr>
-            <a:r>
-              <a:rPr lang="en-US" sz="7289" spc="400">
-                <a:solidFill>
-                  <a:srgbClr val="132D17"/>
-                </a:solidFill>
-                <a:latin typeface="Roboto Condensed"/>
-                <a:ea typeface="Roboto Condensed"/>
-                <a:cs typeface="Roboto Condensed"/>
-                <a:sym typeface="Roboto Condensed"/>
-              </a:rPr>
-              <a:t>THE 'LIAR'S DIVIDEND' IN NUMBERS &amp; STRATEGY</a:t>
-            </a:r>
-          </a:p>
-        </p:txBody>
-      </p:sp>
-      <p:sp>
-        <p:nvSpPr>
-          <p:cNvPr name="TextBox 4" id="4"/>
-          <p:cNvSpPr txBox="true"/>
+      </p:sp>
+    </p:spTree>
+  </p:cSld>
+  <p:clrMapOvr>
+    <a:masterClrMapping/>
+  </p:clrMapOvr>
+</p:sld>
+</file>
+
+<file path=ppt/slides/slide3.xml><?xml version="1.0" encoding="utf-8"?>
+<p:sld xmlns:p="http://schemas.openxmlformats.org/presentationml/2006/main" xmlns:a="http://schemas.openxmlformats.org/drawingml/2006/main" xmlns:r="http://schemas.openxmlformats.org/officeDocument/2006/relationships">
+  <p:cSld>
+    <p:spTree>
+      <p:nvGrpSpPr>
+        <p:cNvPr id="1" name=""/>
+        <p:cNvGrpSpPr/>
+        <p:nvPr/>
+      </p:nvGrpSpPr>
+      <p:grpSpPr>
+        <a:xfrm>
+          <a:off x="0" y="0"/>
+          <a:ext cx="0" cy="0"/>
+          <a:chOff x="0" y="0"/>
+          <a:chExt cx="0" cy="0"/>
+        </a:xfrm>
+      </p:grpSpPr>
+      <p:sp>
+        <p:nvSpPr>
+          <p:cNvPr name="Freeform 2" id="2"/>
+          <p:cNvSpPr/>
           <p:nvPr/>
         </p:nvSpPr>
         <p:spPr>
-          <a:xfrm rot="0">
-            <a:off x="1011432" y="2903352"/>
-            <a:ext cx="6848475" cy="5673871"/>
+          <a:xfrm flipH="false" flipV="false" rot="0">
+            <a:off x="0" y="0"/>
+            <a:ext cx="26212800" cy="14417040"/>
           </a:xfrm>
-          <a:prstGeom prst="rect">
+          <a:custGeom>
             <a:avLst/>
-          </a:prstGeom>
+            <a:gdLst/>
+            <a:ahLst/>
+            <a:cxnLst/>
+            <a:rect r="r" b="b" t="t" l="l"/>
+            <a:pathLst>
+              <a:path h="14417040" w="26212800">
+                <a:moveTo>
+                  <a:pt x="0" y="0"/>
+                </a:moveTo>
+                <a:lnTo>
+                  <a:pt x="26212800" y="0"/>
+                </a:lnTo>
+                <a:lnTo>
+                  <a:pt x="26212800" y="14417040"/>
+                </a:lnTo>
+                <a:lnTo>
+                  <a:pt x="0" y="14417040"/>
+                </a:lnTo>
+                <a:lnTo>
+                  <a:pt x="0" y="0"/>
+                </a:lnTo>
+                <a:close/>
+              </a:path>
+            </a:pathLst>
+          </a:custGeom>
+          <a:blipFill>
+            <a:blip r:embed="rId2"/>
+            <a:stretch>
+              <a:fillRect l="0" t="0" r="0" b="0"/>
+            </a:stretch>
+          </a:blipFill>
         </p:spPr>
-        <p:txBody>
-          <a:bodyPr anchor="t" rtlCol="false" tIns="0" lIns="0" bIns="0" rIns="0">
-            <a:spAutoFit/>
-          </a:bodyPr>
-          <a:lstStyle/>
-          <a:p>
-            <a:pPr algn="l">
-              <a:lnSpc>
-                <a:spcPts val="6400"/>
-              </a:lnSpc>
-            </a:pPr>
-            <a:r>
-              <a:rPr lang="en-US" sz="4859" spc="208">
-                <a:solidFill>
-                  <a:srgbClr val="118051"/>
-                </a:solidFill>
-                <a:latin typeface="Roboto Condensed"/>
-                <a:ea typeface="Roboto Condensed"/>
-                <a:cs typeface="Roboto Condensed"/>
-                <a:sym typeface="Roboto Condensed"/>
-              </a:rPr>
-              <a:t>THE HUMAN ELEMENT:</a:t>
-            </a:r>
-          </a:p>
-          <a:p>
-            <a:pPr algn="l">
-              <a:lnSpc>
-                <a:spcPts val="4585"/>
-              </a:lnSpc>
-            </a:pPr>
-            <a:r>
-              <a:rPr lang="en-US" sz="3481">
-                <a:solidFill>
-                  <a:srgbClr val="132D17"/>
-                </a:solidFill>
-                <a:latin typeface="Clear Sans Bold"/>
-                <a:ea typeface="Clear Sans Bold"/>
-                <a:cs typeface="Clear Sans Bold"/>
-                <a:sym typeface="Clear Sans Bold"/>
-              </a:rPr>
-              <a:t>VOLUME &amp; VALUE SHIFT</a:t>
-            </a:r>
-          </a:p>
-          <a:p>
-            <a:pPr algn="l">
-              <a:lnSpc>
-                <a:spcPts val="11283"/>
-              </a:lnSpc>
-            </a:pPr>
-            <a:r>
-              <a:rPr lang="en-US" sz="8567" spc="265">
-                <a:solidFill>
-                  <a:srgbClr val="118051"/>
-                </a:solidFill>
-                <a:latin typeface="Roboto Condensed"/>
-                <a:ea typeface="Roboto Condensed"/>
-                <a:cs typeface="Roboto Condensed"/>
-                <a:sym typeface="Roboto Condensed"/>
-              </a:rPr>
-              <a:t>60% INCREASE</a:t>
-            </a:r>
-          </a:p>
-          <a:p>
-            <a:pPr algn="l">
-              <a:lnSpc>
-                <a:spcPts val="3912"/>
-              </a:lnSpc>
-            </a:pPr>
-            <a:r>
-              <a:rPr lang="en-US" sz="2971" spc="127">
-                <a:solidFill>
-                  <a:srgbClr val="252523"/>
-                </a:solidFill>
-                <a:latin typeface="Roboto Condensed"/>
-                <a:ea typeface="Roboto Condensed"/>
-                <a:cs typeface="Roboto Condensed"/>
-                <a:sym typeface="Roboto Condensed"/>
-              </a:rPr>
-              <a:t>Financial Institutions Reporting Higher</a:t>
-            </a:r>
-          </a:p>
-          <a:p>
-            <a:pPr algn="l">
-              <a:lnSpc>
-                <a:spcPts val="3912"/>
-              </a:lnSpc>
-            </a:pPr>
-            <a:r>
-              <a:rPr lang="en-US" sz="2971" spc="127">
-                <a:solidFill>
-                  <a:srgbClr val="252523"/>
-                </a:solidFill>
-                <a:latin typeface="Roboto Condensed"/>
-                <a:ea typeface="Roboto Condensed"/>
-                <a:cs typeface="Roboto Condensed"/>
-                <a:sym typeface="Roboto Condensed"/>
-              </a:rPr>
-              <a:t>Fraud Volume [19]</a:t>
-            </a:r>
-          </a:p>
-          <a:p>
-            <a:pPr algn="l">
-              <a:lnSpc>
-                <a:spcPts val="10444"/>
-              </a:lnSpc>
-            </a:pPr>
-            <a:r>
-              <a:rPr lang="en-US" sz="7930" spc="444">
-                <a:solidFill>
-                  <a:srgbClr val="118051"/>
-                </a:solidFill>
-                <a:latin typeface="Roboto Condensed"/>
-                <a:ea typeface="Roboto Condensed"/>
-                <a:cs typeface="Roboto Condensed"/>
-                <a:sym typeface="Roboto Condensed"/>
-              </a:rPr>
-              <a:t>€4.2 BILLION</a:t>
-            </a:r>
-          </a:p>
-          <a:p>
-            <a:pPr algn="l">
-              <a:lnSpc>
-                <a:spcPts val="4267"/>
-              </a:lnSpc>
-            </a:pPr>
-            <a:r>
-              <a:rPr lang="en-US" sz="3240" spc="6">
-                <a:solidFill>
-                  <a:srgbClr val="252523"/>
-                </a:solidFill>
-                <a:latin typeface="Roboto Condensed"/>
-                <a:ea typeface="Roboto Condensed"/>
-                <a:cs typeface="Roboto Condensed"/>
-                <a:sym typeface="Roboto Condensed"/>
-              </a:rPr>
-              <a:t>Total EU Payment Fraud (+17% YoY) [22]</a:t>
-            </a:r>
-          </a:p>
-        </p:txBody>
-      </p:sp>
-      <p:sp>
-        <p:nvSpPr>
-          <p:cNvPr name="TextBox 5" id="5"/>
-          <p:cNvSpPr txBox="true"/>
+      </p:sp>
+    </p:spTree>
+  </p:cSld>
+  <p:clrMapOvr>
+    <a:masterClrMapping/>
+  </p:clrMapOvr>
+</p:sld>
+</file>
+
+<file path=ppt/slides/slide4.xml><?xml version="1.0" encoding="utf-8"?>
+<p:sld xmlns:p="http://schemas.openxmlformats.org/presentationml/2006/main" xmlns:a="http://schemas.openxmlformats.org/drawingml/2006/main" xmlns:r="http://schemas.openxmlformats.org/officeDocument/2006/relationships">
+  <p:cSld>
+    <p:spTree>
+      <p:nvGrpSpPr>
+        <p:cNvPr id="1" name=""/>
+        <p:cNvGrpSpPr/>
+        <p:nvPr/>
+      </p:nvGrpSpPr>
+      <p:grpSpPr>
+        <a:xfrm>
+          <a:off x="0" y="0"/>
+          <a:ext cx="0" cy="0"/>
+          <a:chOff x="0" y="0"/>
+          <a:chExt cx="0" cy="0"/>
+        </a:xfrm>
+      </p:grpSpPr>
+      <p:sp>
+        <p:nvSpPr>
+          <p:cNvPr name="Freeform 2" id="2"/>
+          <p:cNvSpPr/>
           <p:nvPr/>
         </p:nvSpPr>
         <p:spPr>
-          <a:xfrm rot="316061">
-            <a:off x="1044595" y="9252361"/>
-            <a:ext cx="4610100" cy="1227811"/>
+          <a:xfrm flipH="false" flipV="false" rot="0">
+            <a:off x="0" y="0"/>
+            <a:ext cx="26212800" cy="14417040"/>
           </a:xfrm>
-          <a:prstGeom prst="rect">
+          <a:custGeom>
             <a:avLst/>
-          </a:prstGeom>
+            <a:gdLst/>
+            <a:ahLst/>
+            <a:cxnLst/>
+            <a:rect r="r" b="b" t="t" l="l"/>
+            <a:pathLst>
+              <a:path h="14417040" w="26212800">
+                <a:moveTo>
+                  <a:pt x="0" y="0"/>
+                </a:moveTo>
+                <a:lnTo>
+                  <a:pt x="26212800" y="0"/>
+                </a:lnTo>
+                <a:lnTo>
+                  <a:pt x="26212800" y="14417040"/>
+                </a:lnTo>
+                <a:lnTo>
+                  <a:pt x="0" y="14417040"/>
+                </a:lnTo>
+                <a:lnTo>
+                  <a:pt x="0" y="0"/>
+                </a:lnTo>
+                <a:close/>
+              </a:path>
+            </a:pathLst>
+          </a:custGeom>
+          <a:blipFill>
+            <a:blip r:embed="rId2"/>
+            <a:stretch>
+              <a:fillRect l="0" t="0" r="0" b="0"/>
+            </a:stretch>
+          </a:blipFill>
         </p:spPr>
-        <p:txBody>
-          <a:bodyPr anchor="t" rtlCol="false" tIns="0" lIns="0" bIns="0" rIns="0">
-            <a:spAutoFit/>
-          </a:bodyPr>
-          <a:lstStyle/>
-          <a:p>
-            <a:pPr algn="ctr">
-              <a:lnSpc>
-                <a:spcPts val="10025"/>
-              </a:lnSpc>
-            </a:pPr>
-            <a:r>
-              <a:rPr lang="en-US" sz="7160" spc="-279">
-                <a:solidFill>
-                  <a:srgbClr val="155D37"/>
-                </a:solidFill>
-                <a:latin typeface="Roboto Condensed"/>
-                <a:ea typeface="Roboto Condensed"/>
-                <a:cs typeface="Roboto Condensed"/>
-                <a:sym typeface="Roboto Condensed"/>
-              </a:rPr>
-              <a:t>+12% LOSSES</a:t>
-            </a:r>
-          </a:p>
-        </p:txBody>
-      </p:sp>
-      <p:sp>
-        <p:nvSpPr>
-          <p:cNvPr name="TextBox 6" id="6"/>
-          <p:cNvSpPr txBox="true"/>
-          <p:nvPr/>
-        </p:nvSpPr>
-        <p:spPr>
-          <a:xfrm rot="0">
-            <a:off x="3709316" y="9141071"/>
-            <a:ext cx="2952750" cy="770555"/>
-          </a:xfrm>
-          <a:prstGeom prst="rect">
-            <a:avLst/>
-          </a:prstGeom>
-        </p:spPr>
-        <p:txBody>
-          <a:bodyPr anchor="t" rtlCol="false" tIns="0" lIns="0" bIns="0" rIns="0">
-            <a:spAutoFit/>
-          </a:bodyPr>
-          <a:lstStyle/>
-          <a:p>
-            <a:pPr algn="ctr">
-              <a:lnSpc>
-                <a:spcPts val="6353"/>
-              </a:lnSpc>
-            </a:pPr>
-            <a:r>
-              <a:rPr lang="en-US" sz="4538" spc="222">
-                <a:solidFill>
-                  <a:srgbClr val="132D17"/>
-                </a:solidFill>
-                <a:latin typeface="Roboto Condensed"/>
-                <a:ea typeface="Roboto Condensed"/>
-                <a:cs typeface="Roboto Condensed"/>
-                <a:sym typeface="Roboto Condensed"/>
-              </a:rPr>
-              <a:t>APP FRAUD</a:t>
-            </a:r>
-          </a:p>
-        </p:txBody>
-      </p:sp>
-      <p:sp>
-        <p:nvSpPr>
-          <p:cNvPr name="TextBox 7" id="7"/>
-          <p:cNvSpPr txBox="true"/>
-          <p:nvPr/>
-        </p:nvSpPr>
-        <p:spPr>
-          <a:xfrm rot="0">
-            <a:off x="1005304" y="10419837"/>
-            <a:ext cx="7343775" cy="549423"/>
-          </a:xfrm>
-          <a:prstGeom prst="rect">
-            <a:avLst/>
-          </a:prstGeom>
-        </p:spPr>
-        <p:txBody>
-          <a:bodyPr anchor="t" rtlCol="false" tIns="0" lIns="0" bIns="0" rIns="0">
-            <a:spAutoFit/>
-          </a:bodyPr>
-          <a:lstStyle/>
-          <a:p>
-            <a:pPr algn="ctr">
-              <a:lnSpc>
-                <a:spcPts val="4366"/>
-              </a:lnSpc>
-            </a:pPr>
-            <a:r>
-              <a:rPr lang="en-US" sz="3119" spc="40">
-                <a:solidFill>
-                  <a:srgbClr val="252523"/>
-                </a:solidFill>
-                <a:latin typeface="Roboto Condensed"/>
-                <a:ea typeface="Roboto Condensed"/>
-                <a:cs typeface="Roboto Condensed"/>
-                <a:sym typeface="Roboto Condensed"/>
-              </a:rPr>
-              <a:t>Authorized Push Payment (Human Layer) [29]</a:t>
-            </a:r>
-          </a:p>
-        </p:txBody>
-      </p:sp>
-      <p:sp>
-        <p:nvSpPr>
-          <p:cNvPr name="TextBox 8" id="8"/>
-          <p:cNvSpPr txBox="true"/>
-          <p:nvPr/>
-        </p:nvSpPr>
-        <p:spPr>
-          <a:xfrm rot="0">
-            <a:off x="3725228" y="11373418"/>
-            <a:ext cx="2133600" cy="763602"/>
-          </a:xfrm>
-          <a:prstGeom prst="rect">
-            <a:avLst/>
-          </a:prstGeom>
-        </p:spPr>
-        <p:txBody>
-          <a:bodyPr anchor="t" rtlCol="false" tIns="0" lIns="0" bIns="0" rIns="0">
-            <a:spAutoFit/>
-          </a:bodyPr>
-          <a:lstStyle/>
-          <a:p>
-            <a:pPr algn="ctr">
-              <a:lnSpc>
-                <a:spcPts val="6211"/>
-              </a:lnSpc>
-            </a:pPr>
-            <a:r>
-              <a:rPr lang="en-US" sz="4436" spc="257">
-                <a:solidFill>
-                  <a:srgbClr val="132D17"/>
-                </a:solidFill>
-                <a:latin typeface="Roboto Condensed"/>
-                <a:ea typeface="Roboto Condensed"/>
-                <a:cs typeface="Roboto Condensed"/>
-                <a:sym typeface="Roboto Condensed"/>
-              </a:rPr>
-              <a:t>REMOTE</a:t>
-            </a:r>
-          </a:p>
-        </p:txBody>
-      </p:sp>
-      <p:sp>
-        <p:nvSpPr>
-          <p:cNvPr name="TextBox 9" id="9"/>
-          <p:cNvSpPr txBox="true"/>
-          <p:nvPr/>
-        </p:nvSpPr>
-        <p:spPr>
-          <a:xfrm rot="0">
-            <a:off x="1041629" y="11634571"/>
-            <a:ext cx="7086600" cy="1500972"/>
-          </a:xfrm>
-          <a:prstGeom prst="rect">
-            <a:avLst/>
-          </a:prstGeom>
-        </p:spPr>
-        <p:txBody>
-          <a:bodyPr anchor="t" rtlCol="false" tIns="0" lIns="0" bIns="0" rIns="0">
-            <a:spAutoFit/>
-          </a:bodyPr>
-          <a:lstStyle/>
-          <a:p>
-            <a:pPr algn="l">
-              <a:lnSpc>
-                <a:spcPts val="7873"/>
-              </a:lnSpc>
-            </a:pPr>
-            <a:r>
-              <a:rPr lang="en-US" sz="6278" spc="-113">
-                <a:solidFill>
-                  <a:srgbClr val="134B2C"/>
-                </a:solidFill>
-                <a:latin typeface="Roboto Condensed"/>
-                <a:ea typeface="Roboto Condensed"/>
-                <a:cs typeface="Roboto Condensed"/>
-                <a:sym typeface="Roboto Condensed"/>
-              </a:rPr>
-              <a:t>-24% BANKING LOSSES</a:t>
-            </a:r>
-          </a:p>
-          <a:p>
-            <a:pPr algn="l">
-              <a:lnSpc>
-                <a:spcPts val="4031"/>
-              </a:lnSpc>
-            </a:pPr>
-            <a:r>
-              <a:rPr lang="en-US" sz="3214" spc="3">
-                <a:solidFill>
-                  <a:srgbClr val="252523"/>
-                </a:solidFill>
-                <a:latin typeface="Roboto Condensed"/>
-                <a:ea typeface="Roboto Condensed"/>
-                <a:cs typeface="Roboto Condensed"/>
-                <a:sym typeface="Roboto Condensed"/>
-              </a:rPr>
-              <a:t>Technical Attacks Diminishing [29]</a:t>
-            </a:r>
-          </a:p>
-        </p:txBody>
-      </p:sp>
-      <p:sp>
-        <p:nvSpPr>
-          <p:cNvPr name="TextBox 10" id="10"/>
-          <p:cNvSpPr txBox="true"/>
-          <p:nvPr/>
-        </p:nvSpPr>
-        <p:spPr>
-          <a:xfrm rot="0">
-            <a:off x="9477946" y="2881121"/>
-            <a:ext cx="7191375" cy="830157"/>
-          </a:xfrm>
-          <a:prstGeom prst="rect">
-            <a:avLst/>
-          </a:prstGeom>
-        </p:spPr>
-        <p:txBody>
-          <a:bodyPr anchor="t" rtlCol="false" tIns="0" lIns="0" bIns="0" rIns="0">
-            <a:spAutoFit/>
-          </a:bodyPr>
-          <a:lstStyle/>
-          <a:p>
-            <a:pPr algn="ctr">
-              <a:lnSpc>
-                <a:spcPts val="6743"/>
-              </a:lnSpc>
-            </a:pPr>
-            <a:r>
-              <a:rPr lang="en-US" sz="4816" spc="216">
-                <a:solidFill>
-                  <a:srgbClr val="132D17"/>
-                </a:solidFill>
-                <a:latin typeface="Roboto Condensed"/>
-                <a:ea typeface="Roboto Condensed"/>
-                <a:cs typeface="Roboto Condensed"/>
-                <a:sym typeface="Roboto Condensed"/>
-              </a:rPr>
-              <a:t>INDUSTRIALIZED THREATS</a:t>
-            </a:r>
-          </a:p>
-        </p:txBody>
-      </p:sp>
-      <p:sp>
-        <p:nvSpPr>
-          <p:cNvPr name="TextBox 11" id="11"/>
-          <p:cNvSpPr txBox="true"/>
-          <p:nvPr/>
-        </p:nvSpPr>
-        <p:spPr>
-          <a:xfrm rot="0">
-            <a:off x="9429178" y="3486813"/>
-            <a:ext cx="6191250" cy="830056"/>
-          </a:xfrm>
-          <a:prstGeom prst="rect">
-            <a:avLst/>
-          </a:prstGeom>
-        </p:spPr>
-        <p:txBody>
-          <a:bodyPr anchor="t" rtlCol="false" tIns="0" lIns="0" bIns="0" rIns="0">
-            <a:spAutoFit/>
-          </a:bodyPr>
-          <a:lstStyle/>
-          <a:p>
-            <a:pPr algn="ctr">
-              <a:lnSpc>
-                <a:spcPts val="6748"/>
-              </a:lnSpc>
-            </a:pPr>
-            <a:r>
-              <a:rPr lang="en-US" sz="4820" spc="255">
-                <a:solidFill>
-                  <a:srgbClr val="132D17"/>
-                </a:solidFill>
-                <a:latin typeface="Roboto Condensed"/>
-                <a:ea typeface="Roboto Condensed"/>
-                <a:cs typeface="Roboto Condensed"/>
-                <a:sym typeface="Roboto Condensed"/>
-              </a:rPr>
-              <a:t>&amp; EMERGING VECTORS</a:t>
-            </a:r>
-          </a:p>
-        </p:txBody>
-      </p:sp>
-      <p:sp>
-        <p:nvSpPr>
-          <p:cNvPr name="TextBox 12" id="12"/>
-          <p:cNvSpPr txBox="true"/>
-          <p:nvPr/>
-        </p:nvSpPr>
-        <p:spPr>
-          <a:xfrm rot="0">
-            <a:off x="9407271" y="4566349"/>
-            <a:ext cx="4514850" cy="1344134"/>
-          </a:xfrm>
-          <a:prstGeom prst="rect">
-            <a:avLst/>
-          </a:prstGeom>
-        </p:spPr>
-        <p:txBody>
-          <a:bodyPr anchor="t" rtlCol="false" tIns="0" lIns="0" bIns="0" rIns="0">
-            <a:spAutoFit/>
-          </a:bodyPr>
-          <a:lstStyle/>
-          <a:p>
-            <a:pPr algn="ctr">
-              <a:lnSpc>
-                <a:spcPts val="10963"/>
-              </a:lnSpc>
-            </a:pPr>
-            <a:r>
-              <a:rPr lang="en-US" sz="7831" spc="321">
-                <a:solidFill>
-                  <a:srgbClr val="118051"/>
-                </a:solidFill>
-                <a:latin typeface="Roboto Condensed"/>
-                <a:ea typeface="Roboto Condensed"/>
-                <a:cs typeface="Roboto Condensed"/>
-                <a:sym typeface="Roboto Condensed"/>
-              </a:rPr>
-              <a:t>8 MILLION</a:t>
-            </a:r>
-          </a:p>
-        </p:txBody>
-      </p:sp>
-      <p:sp>
-        <p:nvSpPr>
-          <p:cNvPr name="TextBox 13" id="13"/>
-          <p:cNvSpPr txBox="true"/>
-          <p:nvPr/>
-        </p:nvSpPr>
-        <p:spPr>
-          <a:xfrm rot="0">
-            <a:off x="14204475" y="4732679"/>
-            <a:ext cx="2581275" cy="1143973"/>
-          </a:xfrm>
-          <a:prstGeom prst="rect">
-            <a:avLst/>
-          </a:prstGeom>
-        </p:spPr>
-        <p:txBody>
-          <a:bodyPr anchor="t" rtlCol="false" tIns="0" lIns="0" bIns="0" rIns="0">
-            <a:spAutoFit/>
-          </a:bodyPr>
-          <a:lstStyle/>
-          <a:p>
-            <a:pPr algn="l">
-              <a:lnSpc>
-                <a:spcPts val="4405"/>
-              </a:lnSpc>
-            </a:pPr>
-            <a:r>
-              <a:rPr lang="en-US" sz="4427" spc="185">
-                <a:solidFill>
-                  <a:srgbClr val="132D17"/>
-                </a:solidFill>
-                <a:latin typeface="Roboto Condensed"/>
-                <a:ea typeface="Roboto Condensed"/>
-                <a:cs typeface="Roboto Condensed"/>
-                <a:sym typeface="Roboto Condensed"/>
-              </a:rPr>
-              <a:t>DEEPFAKE</a:t>
-            </a:r>
-          </a:p>
-          <a:p>
-            <a:pPr algn="l">
-              <a:lnSpc>
-                <a:spcPts val="4405"/>
-              </a:lnSpc>
-            </a:pPr>
-            <a:r>
-              <a:rPr lang="en-US" sz="4427" spc="185">
-                <a:solidFill>
-                  <a:srgbClr val="132D17"/>
-                </a:solidFill>
-                <a:latin typeface="Roboto Condensed"/>
-                <a:ea typeface="Roboto Condensed"/>
-                <a:cs typeface="Roboto Condensed"/>
-                <a:sym typeface="Roboto Condensed"/>
-              </a:rPr>
-              <a:t>FILES</a:t>
-            </a:r>
-          </a:p>
-        </p:txBody>
-      </p:sp>
-      <p:sp>
-        <p:nvSpPr>
-          <p:cNvPr name="TextBox 14" id="14"/>
-          <p:cNvSpPr txBox="true"/>
-          <p:nvPr/>
-        </p:nvSpPr>
-        <p:spPr>
-          <a:xfrm rot="0">
-            <a:off x="9460802" y="5812675"/>
-            <a:ext cx="7553325" cy="541070"/>
-          </a:xfrm>
-          <a:prstGeom prst="rect">
-            <a:avLst/>
-          </a:prstGeom>
-        </p:spPr>
-        <p:txBody>
-          <a:bodyPr anchor="t" rtlCol="false" tIns="0" lIns="0" bIns="0" rIns="0">
-            <a:spAutoFit/>
-          </a:bodyPr>
-          <a:lstStyle/>
-          <a:p>
-            <a:pPr algn="ctr">
-              <a:lnSpc>
-                <a:spcPts val="4302"/>
-              </a:lnSpc>
-            </a:pPr>
-            <a:r>
-              <a:rPr lang="en-US" sz="3073" spc="61">
-                <a:solidFill>
-                  <a:srgbClr val="252523"/>
-                </a:solidFill>
-                <a:latin typeface="Roboto Condensed"/>
-                <a:ea typeface="Roboto Condensed"/>
-                <a:cs typeface="Roboto Condensed"/>
-                <a:sym typeface="Roboto Condensed"/>
-              </a:rPr>
-              <a:t>Circulating in 2025 (up from 500k in 2023) [69]</a:t>
-            </a:r>
-          </a:p>
-        </p:txBody>
-      </p:sp>
-      <p:sp>
-        <p:nvSpPr>
-          <p:cNvPr name="TextBox 15" id="15"/>
-          <p:cNvSpPr txBox="true"/>
-          <p:nvPr/>
-        </p:nvSpPr>
-        <p:spPr>
-          <a:xfrm rot="0">
-            <a:off x="12221908" y="6918927"/>
-            <a:ext cx="2162175" cy="722001"/>
-          </a:xfrm>
-          <a:prstGeom prst="rect">
-            <a:avLst/>
-          </a:prstGeom>
-        </p:spPr>
-        <p:txBody>
-          <a:bodyPr anchor="t" rtlCol="false" tIns="0" lIns="0" bIns="0" rIns="0">
-            <a:spAutoFit/>
-          </a:bodyPr>
-          <a:lstStyle/>
-          <a:p>
-            <a:pPr algn="ctr">
-              <a:lnSpc>
-                <a:spcPts val="5879"/>
-              </a:lnSpc>
-            </a:pPr>
-            <a:r>
-              <a:rPr lang="en-US" sz="4199" spc="361">
-                <a:solidFill>
-                  <a:srgbClr val="132D17"/>
-                </a:solidFill>
-                <a:latin typeface="Roboto Condensed"/>
-                <a:ea typeface="Roboto Condensed"/>
-                <a:cs typeface="Roboto Condensed"/>
-                <a:sym typeface="Roboto Condensed"/>
-              </a:rPr>
-              <a:t>VISHING</a:t>
-            </a:r>
-          </a:p>
-        </p:txBody>
-      </p:sp>
-      <p:sp>
-        <p:nvSpPr>
-          <p:cNvPr name="TextBox 16" id="16"/>
-          <p:cNvSpPr txBox="true"/>
-          <p:nvPr/>
-        </p:nvSpPr>
-        <p:spPr>
-          <a:xfrm rot="328284">
-            <a:off x="9503425" y="7015105"/>
-            <a:ext cx="4286250" cy="1319033"/>
-          </a:xfrm>
-          <a:prstGeom prst="rect">
-            <a:avLst/>
-          </a:prstGeom>
-        </p:spPr>
-        <p:txBody>
-          <a:bodyPr anchor="t" rtlCol="false" tIns="0" lIns="0" bIns="0" rIns="0">
-            <a:spAutoFit/>
-          </a:bodyPr>
-          <a:lstStyle/>
-          <a:p>
-            <a:pPr algn="ctr">
-              <a:lnSpc>
-                <a:spcPts val="10772"/>
-              </a:lnSpc>
-            </a:pPr>
-            <a:r>
-              <a:rPr lang="en-US" sz="7694" spc="-261">
-                <a:solidFill>
-                  <a:srgbClr val="155D37"/>
-                </a:solidFill>
-                <a:latin typeface="Roboto Condensed"/>
-                <a:ea typeface="Roboto Condensed"/>
-                <a:cs typeface="Roboto Condensed"/>
-                <a:sym typeface="Roboto Condensed"/>
-              </a:rPr>
-              <a:t>100% SPIKE</a:t>
-            </a:r>
-          </a:p>
-        </p:txBody>
-      </p:sp>
-      <p:sp>
-        <p:nvSpPr>
-          <p:cNvPr name="TextBox 17" id="17"/>
-          <p:cNvSpPr txBox="true"/>
-          <p:nvPr/>
-        </p:nvSpPr>
-        <p:spPr>
-          <a:xfrm rot="0">
-            <a:off x="9439614" y="8141812"/>
-            <a:ext cx="5924550" cy="574067"/>
-          </a:xfrm>
-          <a:prstGeom prst="rect">
-            <a:avLst/>
-          </a:prstGeom>
-        </p:spPr>
-        <p:txBody>
-          <a:bodyPr anchor="t" rtlCol="false" tIns="0" lIns="0" bIns="0" rIns="0">
-            <a:spAutoFit/>
-          </a:bodyPr>
-          <a:lstStyle/>
-          <a:p>
-            <a:pPr algn="ctr">
-              <a:lnSpc>
-                <a:spcPts val="4583"/>
-              </a:lnSpc>
-            </a:pPr>
-            <a:r>
-              <a:rPr lang="en-US" sz="3273">
-                <a:solidFill>
-                  <a:srgbClr val="252523"/>
-                </a:solidFill>
-                <a:latin typeface="Roboto Condensed"/>
-                <a:ea typeface="Roboto Condensed"/>
-                <a:cs typeface="Roboto Condensed"/>
-                <a:sym typeface="Roboto Condensed"/>
-              </a:rPr>
-              <a:t>Global Voice Phishing Attempts [77]</a:t>
-            </a:r>
-          </a:p>
-        </p:txBody>
-      </p:sp>
-      <p:sp>
-        <p:nvSpPr>
-          <p:cNvPr name="TextBox 18" id="18"/>
-          <p:cNvSpPr txBox="true"/>
-          <p:nvPr/>
-        </p:nvSpPr>
-        <p:spPr>
-          <a:xfrm rot="0">
-            <a:off x="9464710" y="9302534"/>
-            <a:ext cx="7458075" cy="1130027"/>
-          </a:xfrm>
-          <a:prstGeom prst="rect">
-            <a:avLst/>
-          </a:prstGeom>
-        </p:spPr>
-        <p:txBody>
-          <a:bodyPr anchor="t" rtlCol="false" tIns="0" lIns="0" bIns="0" rIns="0">
-            <a:spAutoFit/>
-          </a:bodyPr>
-          <a:lstStyle/>
-          <a:p>
-            <a:pPr algn="ctr">
-              <a:lnSpc>
-                <a:spcPts val="9115"/>
-              </a:lnSpc>
-            </a:pPr>
-            <a:r>
-              <a:rPr lang="en-US" sz="6510" spc="221">
-                <a:solidFill>
-                  <a:srgbClr val="107146"/>
-                </a:solidFill>
-                <a:latin typeface="Roboto Condensed"/>
-                <a:ea typeface="Roboto Condensed"/>
-                <a:cs typeface="Roboto Condensed"/>
-                <a:sym typeface="Roboto Condensed"/>
-              </a:rPr>
-              <a:t>$17 BILLION STOLEN</a:t>
-            </a:r>
-          </a:p>
-        </p:txBody>
-      </p:sp>
-      <p:sp>
-        <p:nvSpPr>
-          <p:cNvPr name="TextBox 19" id="19"/>
-          <p:cNvSpPr txBox="true"/>
-          <p:nvPr/>
-        </p:nvSpPr>
-        <p:spPr>
-          <a:xfrm rot="0">
-            <a:off x="9460040" y="10426356"/>
-            <a:ext cx="7505700" cy="532980"/>
-          </a:xfrm>
-          <a:prstGeom prst="rect">
-            <a:avLst/>
-          </a:prstGeom>
-        </p:spPr>
-        <p:txBody>
-          <a:bodyPr anchor="t" rtlCol="false" tIns="0" lIns="0" bIns="0" rIns="0">
-            <a:spAutoFit/>
-          </a:bodyPr>
-          <a:lstStyle/>
-          <a:p>
-            <a:pPr algn="ctr">
-              <a:lnSpc>
-                <a:spcPts val="4223"/>
-              </a:lnSpc>
-            </a:pPr>
-            <a:r>
-              <a:rPr lang="en-US" sz="3016" spc="87">
-                <a:solidFill>
-                  <a:srgbClr val="252523"/>
-                </a:solidFill>
-                <a:latin typeface="Roboto Condensed"/>
-                <a:ea typeface="Roboto Condensed"/>
-                <a:cs typeface="Roboto Condensed"/>
-                <a:sym typeface="Roboto Condensed"/>
-              </a:rPr>
-              <a:t>Crypto Scams (Impersonation up 1400%) [144]</a:t>
-            </a:r>
-          </a:p>
-        </p:txBody>
-      </p:sp>
-      <p:sp>
-        <p:nvSpPr>
-          <p:cNvPr name="TextBox 20" id="20"/>
-          <p:cNvSpPr txBox="true"/>
-          <p:nvPr/>
-        </p:nvSpPr>
-        <p:spPr>
-          <a:xfrm rot="0">
-            <a:off x="12239244" y="11382253"/>
-            <a:ext cx="1095375" cy="748085"/>
-          </a:xfrm>
-          <a:prstGeom prst="rect">
-            <a:avLst/>
-          </a:prstGeom>
-        </p:spPr>
-        <p:txBody>
-          <a:bodyPr anchor="t" rtlCol="false" tIns="0" lIns="0" bIns="0" rIns="0">
-            <a:spAutoFit/>
-          </a:bodyPr>
-          <a:lstStyle/>
-          <a:p>
-            <a:pPr algn="ctr">
-              <a:lnSpc>
-                <a:spcPts val="6016"/>
-              </a:lnSpc>
-            </a:pPr>
-            <a:r>
-              <a:rPr lang="en-US" sz="4297" spc="322">
-                <a:solidFill>
-                  <a:srgbClr val="132D17"/>
-                </a:solidFill>
-                <a:latin typeface="Roboto Condensed"/>
-                <a:ea typeface="Roboto Condensed"/>
-                <a:cs typeface="Roboto Condensed"/>
-                <a:sym typeface="Roboto Condensed"/>
-              </a:rPr>
-              <a:t>CNP</a:t>
-            </a:r>
-          </a:p>
-        </p:txBody>
-      </p:sp>
-      <p:sp>
-        <p:nvSpPr>
-          <p:cNvPr name="TextBox 21" id="21"/>
-          <p:cNvSpPr txBox="true"/>
-          <p:nvPr/>
-        </p:nvSpPr>
-        <p:spPr>
-          <a:xfrm rot="0">
-            <a:off x="9427515" y="11483203"/>
-            <a:ext cx="5781675" cy="1724302"/>
-          </a:xfrm>
-          <a:prstGeom prst="rect">
-            <a:avLst/>
-          </a:prstGeom>
-        </p:spPr>
-        <p:txBody>
-          <a:bodyPr anchor="t" rtlCol="false" tIns="0" lIns="0" bIns="0" rIns="0">
-            <a:spAutoFit/>
-          </a:bodyPr>
-          <a:lstStyle/>
-          <a:p>
-            <a:pPr algn="l">
-              <a:lnSpc>
-                <a:spcPts val="9649"/>
-              </a:lnSpc>
-            </a:pPr>
-            <a:r>
-              <a:rPr lang="en-US" sz="7688" spc="-369">
-                <a:solidFill>
-                  <a:srgbClr val="155D37"/>
-                </a:solidFill>
-                <a:latin typeface="Roboto Condensed"/>
-                <a:ea typeface="Roboto Condensed"/>
-                <a:cs typeface="Roboto Condensed"/>
-                <a:sym typeface="Roboto Condensed"/>
-              </a:rPr>
-              <a:t>+22% FRAUD</a:t>
-            </a:r>
-          </a:p>
-          <a:p>
-            <a:pPr algn="l">
-              <a:lnSpc>
-                <a:spcPts val="3942"/>
-              </a:lnSpc>
-            </a:pPr>
-            <a:r>
-              <a:rPr lang="en-US" sz="3141" spc="53">
-                <a:solidFill>
-                  <a:srgbClr val="252523"/>
-                </a:solidFill>
-                <a:latin typeface="Roboto Condensed"/>
-                <a:ea typeface="Roboto Condensed"/>
-                <a:cs typeface="Roboto Condensed"/>
-                <a:sym typeface="Roboto Condensed"/>
-              </a:rPr>
-              <a:t>Card Not Present Transactions [39]</a:t>
-            </a:r>
-          </a:p>
-        </p:txBody>
-      </p:sp>
-      <p:sp>
-        <p:nvSpPr>
-          <p:cNvPr name="TextBox 22" id="22"/>
-          <p:cNvSpPr txBox="true"/>
-          <p:nvPr/>
-        </p:nvSpPr>
-        <p:spPr>
-          <a:xfrm rot="0">
-            <a:off x="8854821" y="13893359"/>
-            <a:ext cx="8486775" cy="447804"/>
-          </a:xfrm>
-          <a:prstGeom prst="rect">
-            <a:avLst/>
-          </a:prstGeom>
-        </p:spPr>
-        <p:txBody>
-          <a:bodyPr anchor="t" rtlCol="false" tIns="0" lIns="0" bIns="0" rIns="0">
-            <a:spAutoFit/>
-          </a:bodyPr>
-          <a:lstStyle/>
-          <a:p>
-            <a:pPr algn="ctr">
-              <a:lnSpc>
-                <a:spcPts val="3667"/>
-              </a:lnSpc>
-            </a:pPr>
-            <a:r>
-              <a:rPr lang="en-US" sz="2619" spc="104">
-                <a:solidFill>
-                  <a:srgbClr val="252523"/>
-                </a:solidFill>
-                <a:latin typeface="Roboto Condensed"/>
-                <a:ea typeface="Roboto Condensed"/>
-                <a:cs typeface="Roboto Condensed"/>
-                <a:sym typeface="Roboto Condensed"/>
-              </a:rPr>
-              <a:t>SOURCE: THE INDUSTRIALIZATION OF DECEPTION REPORT</a:t>
-            </a:r>
-          </a:p>
-        </p:txBody>
-      </p:sp>
-      <p:sp>
-        <p:nvSpPr>
-          <p:cNvPr name="TextBox 23" id="23"/>
-          <p:cNvSpPr txBox="true"/>
-          <p:nvPr/>
-        </p:nvSpPr>
-        <p:spPr>
-          <a:xfrm rot="0">
-            <a:off x="18119598" y="3067002"/>
-            <a:ext cx="7105650" cy="1252689"/>
-          </a:xfrm>
-          <a:prstGeom prst="rect">
-            <a:avLst/>
-          </a:prstGeom>
-        </p:spPr>
-        <p:txBody>
-          <a:bodyPr anchor="t" rtlCol="false" tIns="0" lIns="0" bIns="0" rIns="0">
-            <a:spAutoFit/>
-          </a:bodyPr>
-          <a:lstStyle/>
-          <a:p>
-            <a:pPr algn="l">
-              <a:lnSpc>
-                <a:spcPts val="4758"/>
-              </a:lnSpc>
-            </a:pPr>
-            <a:r>
-              <a:rPr lang="en-US" sz="4739" spc="265">
-                <a:solidFill>
-                  <a:srgbClr val="118051"/>
-                </a:solidFill>
-                <a:latin typeface="Roboto Condensed"/>
-                <a:ea typeface="Roboto Condensed"/>
-                <a:cs typeface="Roboto Condensed"/>
-                <a:sym typeface="Roboto Condensed"/>
-              </a:rPr>
-              <a:t>STRATEGIC IMPERATIVES:</a:t>
-            </a:r>
-          </a:p>
-          <a:p>
-            <a:pPr algn="l">
-              <a:lnSpc>
-                <a:spcPts val="4858"/>
-              </a:lnSpc>
-            </a:pPr>
-            <a:r>
-              <a:rPr lang="en-US" sz="4839" spc="246">
-                <a:solidFill>
-                  <a:srgbClr val="132D17"/>
-                </a:solidFill>
-                <a:latin typeface="Roboto Condensed"/>
-                <a:ea typeface="Roboto Condensed"/>
-                <a:cs typeface="Roboto Condensed"/>
-                <a:sym typeface="Roboto Condensed"/>
-              </a:rPr>
-              <a:t>ZERO-TRUST &amp; LIABILITY</a:t>
-            </a:r>
-          </a:p>
-        </p:txBody>
-      </p:sp>
-      <p:sp>
-        <p:nvSpPr>
-          <p:cNvPr name="TextBox 24" id="24"/>
-          <p:cNvSpPr txBox="true"/>
-          <p:nvPr/>
-        </p:nvSpPr>
-        <p:spPr>
-          <a:xfrm rot="0">
-            <a:off x="18177135" y="4742945"/>
-            <a:ext cx="6705600" cy="2244261"/>
-          </a:xfrm>
-          <a:prstGeom prst="rect">
-            <a:avLst/>
-          </a:prstGeom>
-        </p:spPr>
-        <p:txBody>
-          <a:bodyPr anchor="t" rtlCol="false" tIns="0" lIns="0" bIns="0" rIns="0">
-            <a:spAutoFit/>
-          </a:bodyPr>
-          <a:lstStyle/>
-          <a:p>
-            <a:pPr algn="l">
-              <a:lnSpc>
-                <a:spcPts val="4814"/>
-              </a:lnSpc>
-            </a:pPr>
-            <a:r>
-              <a:rPr lang="en-US" sz="4118" spc="82">
-                <a:solidFill>
-                  <a:srgbClr val="155D37"/>
-                </a:solidFill>
-                <a:latin typeface="Roboto Condensed"/>
-                <a:ea typeface="Roboto Condensed"/>
-                <a:cs typeface="Roboto Condensed"/>
-                <a:sym typeface="Roboto Condensed"/>
-              </a:rPr>
-              <a:t>• VERIFY, DON'T JUST DETECT</a:t>
-            </a:r>
-          </a:p>
-          <a:p>
-            <a:pPr algn="l">
-              <a:lnSpc>
-                <a:spcPts val="4337"/>
-              </a:lnSpc>
-            </a:pPr>
-            <a:r>
-              <a:rPr lang="en-US" sz="3710" spc="63">
-                <a:solidFill>
-                  <a:srgbClr val="252523"/>
-                </a:solidFill>
-                <a:latin typeface="Roboto Condensed"/>
-                <a:ea typeface="Roboto Condensed"/>
-                <a:cs typeface="Roboto Condensed"/>
-                <a:sym typeface="Roboto Condensed"/>
-              </a:rPr>
-              <a:t>GenAl erodes trust baseline;</a:t>
-            </a:r>
-          </a:p>
-          <a:p>
-            <a:pPr algn="l">
-              <a:lnSpc>
-                <a:spcPts val="4337"/>
-              </a:lnSpc>
-            </a:pPr>
-            <a:r>
-              <a:rPr lang="en-US" sz="3710" spc="63">
-                <a:solidFill>
-                  <a:srgbClr val="252523"/>
-                </a:solidFill>
-                <a:latin typeface="Roboto Condensed"/>
-                <a:ea typeface="Roboto Condensed"/>
-                <a:cs typeface="Roboto Condensed"/>
-                <a:sym typeface="Roboto Condensed"/>
-              </a:rPr>
-              <a:t>"video confirms identity" paradigm</a:t>
-            </a:r>
-          </a:p>
-          <a:p>
-            <a:pPr algn="l">
-              <a:lnSpc>
-                <a:spcPts val="4337"/>
-              </a:lnSpc>
-            </a:pPr>
-            <a:r>
-              <a:rPr lang="en-US" sz="3710" spc="63">
-                <a:solidFill>
-                  <a:srgbClr val="252523"/>
-                </a:solidFill>
-                <a:latin typeface="Roboto Condensed"/>
-                <a:ea typeface="Roboto Condensed"/>
-                <a:cs typeface="Roboto Condensed"/>
-                <a:sym typeface="Roboto Condensed"/>
-              </a:rPr>
-              <a:t>is broken [6, 73].</a:t>
-            </a:r>
-          </a:p>
-        </p:txBody>
-      </p:sp>
-      <p:sp>
-        <p:nvSpPr>
-          <p:cNvPr name="TextBox 25" id="25"/>
-          <p:cNvSpPr txBox="true"/>
-          <p:nvPr/>
-        </p:nvSpPr>
-        <p:spPr>
-          <a:xfrm rot="0">
-            <a:off x="18529173" y="7729165"/>
-            <a:ext cx="6553200" cy="2210823"/>
-          </a:xfrm>
-          <a:prstGeom prst="rect">
-            <a:avLst/>
-          </a:prstGeom>
-        </p:spPr>
-        <p:txBody>
-          <a:bodyPr anchor="t" rtlCol="false" tIns="0" lIns="0" bIns="0" rIns="0">
-            <a:spAutoFit/>
-          </a:bodyPr>
-          <a:lstStyle/>
-          <a:p>
-            <a:pPr algn="l">
-              <a:lnSpc>
-                <a:spcPts val="4973"/>
-              </a:lnSpc>
-            </a:pPr>
-            <a:r>
-              <a:rPr lang="en-US" sz="4287" spc="8">
-                <a:solidFill>
-                  <a:srgbClr val="155D37"/>
-                </a:solidFill>
-                <a:latin typeface="Roboto Condensed"/>
-                <a:ea typeface="Roboto Condensed"/>
-                <a:cs typeface="Roboto Condensed"/>
-                <a:sym typeface="Roboto Condensed"/>
-              </a:rPr>
-              <a:t>TARGET THE "HUMAN LAYER"</a:t>
-            </a:r>
-          </a:p>
-          <a:p>
-            <a:pPr algn="l">
-              <a:lnSpc>
-                <a:spcPts val="4193"/>
-              </a:lnSpc>
-            </a:pPr>
-            <a:r>
-              <a:rPr lang="en-US" sz="3614" spc="101">
-                <a:solidFill>
-                  <a:srgbClr val="252523"/>
-                </a:solidFill>
-                <a:latin typeface="Roboto Condensed"/>
-                <a:ea typeface="Roboto Condensed"/>
-                <a:cs typeface="Roboto Condensed"/>
-                <a:sym typeface="Roboto Condensed"/>
-              </a:rPr>
-              <a:t>APP fraud is the "crown jewel",</a:t>
-            </a:r>
-          </a:p>
-          <a:p>
-            <a:pPr algn="l">
-              <a:lnSpc>
-                <a:spcPts val="4193"/>
-              </a:lnSpc>
-            </a:pPr>
-            <a:r>
-              <a:rPr lang="en-US" sz="3614" spc="101">
-                <a:solidFill>
-                  <a:srgbClr val="252523"/>
-                </a:solidFill>
-                <a:latin typeface="Roboto Condensed"/>
-                <a:ea typeface="Roboto Condensed"/>
-                <a:cs typeface="Roboto Condensed"/>
-                <a:sym typeface="Roboto Condensed"/>
-              </a:rPr>
-              <a:t>bypassing technical controls by</a:t>
-            </a:r>
-          </a:p>
-          <a:p>
-            <a:pPr algn="l">
-              <a:lnSpc>
-                <a:spcPts val="4193"/>
-              </a:lnSpc>
-            </a:pPr>
-            <a:r>
-              <a:rPr lang="en-US" sz="3614" spc="101">
-                <a:solidFill>
-                  <a:srgbClr val="252523"/>
-                </a:solidFill>
-                <a:latin typeface="Roboto Condensed"/>
-                <a:ea typeface="Roboto Condensed"/>
-                <a:cs typeface="Roboto Condensed"/>
-                <a:sym typeface="Roboto Condensed"/>
-              </a:rPr>
-              <a:t>exploiting customers [141, 32].</a:t>
-            </a:r>
-          </a:p>
-        </p:txBody>
-      </p:sp>
-      <p:sp>
-        <p:nvSpPr>
-          <p:cNvPr name="TextBox 26" id="26"/>
-          <p:cNvSpPr txBox="true"/>
-          <p:nvPr/>
-        </p:nvSpPr>
-        <p:spPr>
-          <a:xfrm rot="0">
-            <a:off x="18521209" y="10688332"/>
-            <a:ext cx="6743700" cy="2187313"/>
-          </a:xfrm>
-          <a:prstGeom prst="rect">
-            <a:avLst/>
-          </a:prstGeom>
-        </p:spPr>
-        <p:txBody>
-          <a:bodyPr anchor="t" rtlCol="false" tIns="0" lIns="0" bIns="0" rIns="0">
-            <a:spAutoFit/>
-          </a:bodyPr>
-          <a:lstStyle/>
-          <a:p>
-            <a:pPr algn="l">
-              <a:lnSpc>
-                <a:spcPts val="4775"/>
-              </a:lnSpc>
-            </a:pPr>
-            <a:r>
-              <a:rPr lang="en-US" sz="4088" spc="98">
-                <a:solidFill>
-                  <a:srgbClr val="155D37"/>
-                </a:solidFill>
-                <a:latin typeface="Roboto Condensed"/>
-                <a:ea typeface="Roboto Condensed"/>
-                <a:cs typeface="Roboto Condensed"/>
-                <a:sym typeface="Roboto Condensed"/>
-              </a:rPr>
-              <a:t>PREPARE FOR LIABILITY SHIFT</a:t>
-            </a:r>
-          </a:p>
-          <a:p>
-            <a:pPr algn="l">
-              <a:lnSpc>
-                <a:spcPts val="4199"/>
-              </a:lnSpc>
-            </a:pPr>
-            <a:r>
-              <a:rPr lang="en-US" sz="3595" spc="104">
-                <a:solidFill>
-                  <a:srgbClr val="252523"/>
-                </a:solidFill>
-                <a:latin typeface="Roboto Condensed"/>
-                <a:ea typeface="Roboto Condensed"/>
-                <a:cs typeface="Roboto Condensed"/>
-                <a:sym typeface="Roboto Condensed"/>
-              </a:rPr>
-              <a:t>New frameworks (PSD3, DORA)</a:t>
-            </a:r>
-          </a:p>
-          <a:p>
-            <a:pPr algn="l">
-              <a:lnSpc>
-                <a:spcPts val="4199"/>
-              </a:lnSpc>
-            </a:pPr>
-            <a:r>
-              <a:rPr lang="en-US" sz="3595" spc="104">
-                <a:solidFill>
-                  <a:srgbClr val="252523"/>
-                </a:solidFill>
-                <a:latin typeface="Roboto Condensed"/>
-                <a:ea typeface="Roboto Condensed"/>
-                <a:cs typeface="Roboto Condensed"/>
-                <a:sym typeface="Roboto Condensed"/>
-              </a:rPr>
-              <a:t>mandate banks act as insurer of</a:t>
-            </a:r>
-          </a:p>
-          <a:p>
-            <a:pPr algn="l">
-              <a:lnSpc>
-                <a:spcPts val="4199"/>
-              </a:lnSpc>
-            </a:pPr>
-            <a:r>
-              <a:rPr lang="en-US" sz="3595" spc="104">
-                <a:solidFill>
-                  <a:srgbClr val="252523"/>
-                </a:solidFill>
-                <a:latin typeface="Roboto Condensed"/>
-                <a:ea typeface="Roboto Condensed"/>
-                <a:cs typeface="Roboto Condensed"/>
-                <a:sym typeface="Roboto Condensed"/>
-              </a:rPr>
-              <a:t>last resort [13, 111].</a:t>
-            </a:r>
-          </a:p>
-        </p:txBody>
       </p:sp>
     </p:spTree>
   </p:cSld>
